--- a/재정학/01_Lectures/앳킨슨지수.pptx
+++ b/재정학/01_Lectures/앳킨슨지수.pptx
@@ -209,7 +209,7 @@
           <a:p>
             <a:fld id="{4A5E00EF-AEA4-43E2-9451-8F9C59A39471}" type="datetimeFigureOut">
               <a:rPr lang="ko-KR" altLang="en-US" smtClean="0"/>
-              <a:t>2026-03-19</a:t>
+              <a:t>2026-05-18</a:t>
             </a:fld>
             <a:endParaRPr lang="ko-KR" altLang="en-US"/>
           </a:p>
@@ -631,7 +631,7 @@
           <a:p>
             <a:fld id="{CD32C56F-BD27-4999-9E6D-D4EACE3DA9F4}" type="datetime1">
               <a:rPr lang="ko-KR" altLang="en-US" smtClean="0"/>
-              <a:t>2026-03-19</a:t>
+              <a:t>2026-05-18</a:t>
             </a:fld>
             <a:endParaRPr lang="ko-KR" altLang="en-US"/>
           </a:p>
@@ -845,7 +845,7 @@
           <a:p>
             <a:fld id="{8EF4A19C-72C8-45CA-8E3F-68A7FA345D6C}" type="datetime1">
               <a:rPr lang="ko-KR" altLang="en-US" smtClean="0"/>
-              <a:t>2026-03-19</a:t>
+              <a:t>2026-05-18</a:t>
             </a:fld>
             <a:endParaRPr lang="ko-KR" altLang="en-US"/>
           </a:p>
@@ -1069,7 +1069,7 @@
           <a:p>
             <a:fld id="{56A175B2-010B-4341-954C-5F8F5C70B124}" type="datetime1">
               <a:rPr lang="ko-KR" altLang="en-US" smtClean="0"/>
-              <a:t>2026-03-19</a:t>
+              <a:t>2026-05-18</a:t>
             </a:fld>
             <a:endParaRPr lang="ko-KR" altLang="en-US"/>
           </a:p>
@@ -1283,7 +1283,7 @@
           <a:p>
             <a:fld id="{16B83F9E-22C9-45CA-9E85-070F1D3EF530}" type="datetime1">
               <a:rPr lang="ko-KR" altLang="en-US" smtClean="0"/>
-              <a:t>2026-03-19</a:t>
+              <a:t>2026-05-18</a:t>
             </a:fld>
             <a:endParaRPr lang="ko-KR" altLang="en-US"/>
           </a:p>
@@ -1574,7 +1574,7 @@
           <a:p>
             <a:fld id="{03278F45-FB3C-4C4D-B89A-7BC3F5F229F6}" type="datetime1">
               <a:rPr lang="ko-KR" altLang="en-US" smtClean="0"/>
-              <a:t>2026-03-19</a:t>
+              <a:t>2026-05-18</a:t>
             </a:fld>
             <a:endParaRPr lang="ko-KR" altLang="en-US"/>
           </a:p>
@@ -1967,7 +1967,7 @@
           <a:p>
             <a:fld id="{38FDAC3C-35A6-415C-9F03-738A6AC328B1}" type="datetime1">
               <a:rPr lang="ko-KR" altLang="en-US" smtClean="0"/>
-              <a:t>2026-03-19</a:t>
+              <a:t>2026-05-18</a:t>
             </a:fld>
             <a:endParaRPr lang="ko-KR" altLang="en-US"/>
           </a:p>
@@ -3561,7 +3561,7 @@
           <a:p>
             <a:fld id="{507A0DF1-AEE6-4B0D-89D2-351E7B3EF65C}" type="datetime1">
               <a:rPr lang="ko-KR" altLang="en-US" smtClean="0"/>
-              <a:t>2026-03-19</a:t>
+              <a:t>2026-05-18</a:t>
             </a:fld>
             <a:endParaRPr lang="ko-KR" altLang="en-US"/>
           </a:p>
@@ -3989,7 +3989,7 @@
           <a:p>
             <a:fld id="{CA93B8C9-630F-4D57-944D-04FD37CECCD3}" type="datetime1">
               <a:rPr lang="ko-KR" altLang="en-US" smtClean="0"/>
-              <a:t>2026-03-19</a:t>
+              <a:t>2026-05-18</a:t>
             </a:fld>
             <a:endParaRPr lang="ko-KR" altLang="en-US"/>
           </a:p>
@@ -4146,7 +4146,7 @@
           <a:p>
             <a:fld id="{E986165A-AC43-4902-9541-874ECD310BA3}" type="datetime1">
               <a:rPr lang="ko-KR" altLang="en-US" smtClean="0"/>
-              <a:t>2026-03-19</a:t>
+              <a:t>2026-05-18</a:t>
             </a:fld>
             <a:endParaRPr lang="ko-KR" altLang="en-US"/>
           </a:p>
@@ -4473,7 +4473,7 @@
           <a:p>
             <a:fld id="{47E6EE6D-2B0E-43A9-87A2-7354CDB998F4}" type="datetime1">
               <a:rPr lang="ko-KR" altLang="en-US" smtClean="0"/>
-              <a:t>2026-03-19</a:t>
+              <a:t>2026-05-18</a:t>
             </a:fld>
             <a:endParaRPr lang="ko-KR" altLang="en-US"/>
           </a:p>
@@ -4777,7 +4777,7 @@
           <a:p>
             <a:fld id="{5CC5944E-0BC8-4FAA-9F94-6B4B05834E10}" type="datetime1">
               <a:rPr lang="ko-KR" altLang="en-US" smtClean="0"/>
-              <a:t>2026-03-19</a:t>
+              <a:t>2026-05-18</a:t>
             </a:fld>
             <a:endParaRPr lang="ko-KR" altLang="en-US"/>
           </a:p>
@@ -7088,8 +7088,8 @@
           </a:p>
         </p:txBody>
       </p:sp>
-      <mc:AlternateContent xmlns:mc="http://schemas.openxmlformats.org/markup-compatibility/2006">
-        <mc:Choice xmlns:a14="http://schemas.microsoft.com/office/drawing/2010/main" Requires="a14">
+      <mc:AlternateContent xmlns:mc="http://schemas.openxmlformats.org/markup-compatibility/2006" xmlns:a14="http://schemas.microsoft.com/office/drawing/2010/main">
+        <mc:Choice Requires="a14">
           <p:sp>
             <p:nvSpPr>
               <p:cNvPr id="5" name="TextBox 4">
@@ -7602,7 +7602,7 @@
             </p:txBody>
           </p:sp>
         </mc:Choice>
-        <mc:Fallback>
+        <mc:Fallback xmlns="">
           <p:sp>
             <p:nvSpPr>
               <p:cNvPr id="5" name="TextBox 4">
@@ -7761,7 +7761,7 @@
             <p:spPr>
               <a:xfrm>
                 <a:off x="288790" y="958844"/>
-                <a:ext cx="11250267" cy="2301849"/>
+                <a:ext cx="11250267" cy="5626540"/>
               </a:xfrm>
               <a:prstGeom prst="rect">
                 <a:avLst/>
@@ -7996,6 +7996,339 @@
                   <a:t>. </a:t>
                 </a:r>
               </a:p>
+              <a:p>
+                <a:pPr marL="377825" indent="-285750">
+                  <a:lnSpc>
+                    <a:spcPct val="150000"/>
+                  </a:lnSpc>
+                  <a:buFont typeface="Arial" panose="020B0604020202020204" pitchFamily="34" charset="0"/>
+                  <a:buChar char="•"/>
+                </a:pPr>
+                <a:r>
+                  <a:rPr lang="ko-KR" altLang="en-US" sz="1600" spc="-50" dirty="0" err="1"/>
+                  <a:t>앳킨슨지수는</a:t>
+                </a:r>
+                <a:r>
+                  <a:rPr lang="ko-KR" altLang="en-US" sz="1600" spc="-50" dirty="0"/>
+                  <a:t> 아래의 식을 통해 도출이 된다</a:t>
+                </a:r>
+                <a:r>
+                  <a:rPr lang="en-US" altLang="ko-KR" sz="1600" spc="-50" dirty="0"/>
+                  <a:t>.</a:t>
+                </a:r>
+              </a:p>
+              <a:p>
+                <a:pPr marL="377825" indent="-285750">
+                  <a:lnSpc>
+                    <a:spcPct val="150000"/>
+                  </a:lnSpc>
+                  <a:buFont typeface="Arial" panose="020B0604020202020204" pitchFamily="34" charset="0"/>
+                  <a:buChar char="•"/>
+                </a:pPr>
+                <a:endParaRPr lang="en-US" altLang="ko-KR" sz="1600" spc="-50" dirty="0"/>
+              </a:p>
+              <a:p>
+                <a:pPr marL="377825" indent="-285750">
+                  <a:lnSpc>
+                    <a:spcPct val="150000"/>
+                  </a:lnSpc>
+                  <a:buFont typeface="Arial" panose="020B0604020202020204" pitchFamily="34" charset="0"/>
+                  <a:buChar char="•"/>
+                </a:pPr>
+                <a:endParaRPr lang="en-US" altLang="ko-KR" sz="1600" spc="-50" dirty="0"/>
+              </a:p>
+              <a:p>
+                <a:pPr marL="92075">
+                  <a:lnSpc>
+                    <a:spcPct val="150000"/>
+                  </a:lnSpc>
+                </a:pPr>
+                <a:endParaRPr lang="en-US" altLang="ko-KR" sz="1600" spc="-50" dirty="0"/>
+              </a:p>
+              <a:p>
+                <a:pPr marL="835025" lvl="1" indent="-285750">
+                  <a:lnSpc>
+                    <a:spcPct val="150000"/>
+                  </a:lnSpc>
+                  <a:buFont typeface="Wingdings" panose="05000000000000000000" pitchFamily="2" charset="2"/>
+                  <a:buChar char="ü"/>
+                </a:pPr>
+                <a14:m>
+                  <m:oMath xmlns:m="http://schemas.openxmlformats.org/officeDocument/2006/math">
+                    <m:sSub>
+                      <m:sSubPr>
+                        <m:ctrlPr>
+                          <a:rPr lang="en-US" altLang="ko-KR" sz="1600" i="1" spc="-50">
+                            <a:latin typeface="Cambria Math" panose="02040503050406030204" pitchFamily="18" charset="0"/>
+                          </a:rPr>
+                        </m:ctrlPr>
+                      </m:sSubPr>
+                      <m:e>
+                        <m:r>
+                          <a:rPr lang="en-US" altLang="ko-KR" sz="1600" i="1" spc="-50">
+                            <a:latin typeface="Cambria Math" panose="02040503050406030204" pitchFamily="18" charset="0"/>
+                          </a:rPr>
+                          <m:t>𝑌</m:t>
+                        </m:r>
+                      </m:e>
+                      <m:sub>
+                        <m:r>
+                          <a:rPr lang="en-US" altLang="ko-KR" sz="1600" i="1" spc="-50">
+                            <a:latin typeface="Cambria Math" panose="02040503050406030204" pitchFamily="18" charset="0"/>
+                          </a:rPr>
+                          <m:t>𝑖</m:t>
+                        </m:r>
+                      </m:sub>
+                    </m:sSub>
+                  </m:oMath>
+                </a14:m>
+                <a:r>
+                  <a:rPr lang="ko-KR" altLang="en-US" sz="1600" spc="-50" dirty="0"/>
+                  <a:t>는 </a:t>
+                </a:r>
+                <a14:m>
+                  <m:oMath xmlns:m="http://schemas.openxmlformats.org/officeDocument/2006/math">
+                    <m:r>
+                      <a:rPr lang="en-US" altLang="ko-KR" sz="1600" b="0" i="1" spc="-50" smtClean="0">
+                        <a:latin typeface="Cambria Math" panose="02040503050406030204" pitchFamily="18" charset="0"/>
+                      </a:rPr>
+                      <m:t>𝑖</m:t>
+                    </m:r>
+                  </m:oMath>
+                </a14:m>
+                <a:r>
+                  <a:rPr lang="ko-KR" altLang="en-US" sz="1600" spc="-50" dirty="0"/>
+                  <a:t>번째 소득계층에 속하는 사람들의 소득</a:t>
+                </a:r>
+                <a:r>
+                  <a:rPr lang="en-US" altLang="ko-KR" sz="1600" spc="-50" dirty="0"/>
+                  <a:t>, </a:t>
+                </a:r>
+                <a14:m>
+                  <m:oMath xmlns:m="http://schemas.openxmlformats.org/officeDocument/2006/math">
+                    <m:sSub>
+                      <m:sSubPr>
+                        <m:ctrlPr>
+                          <a:rPr lang="en-US" altLang="ko-KR" sz="1600" i="1" spc="-50">
+                            <a:latin typeface="Cambria Math" panose="02040503050406030204" pitchFamily="18" charset="0"/>
+                          </a:rPr>
+                        </m:ctrlPr>
+                      </m:sSubPr>
+                      <m:e>
+                        <m:r>
+                          <a:rPr lang="en-US" altLang="ko-KR" sz="1600" i="1" spc="-50">
+                            <a:latin typeface="Cambria Math" panose="02040503050406030204" pitchFamily="18" charset="0"/>
+                          </a:rPr>
+                          <m:t>𝑓</m:t>
+                        </m:r>
+                      </m:e>
+                      <m:sub>
+                        <m:r>
+                          <a:rPr lang="en-US" altLang="ko-KR" sz="1600" i="1" spc="-50">
+                            <a:latin typeface="Cambria Math" panose="02040503050406030204" pitchFamily="18" charset="0"/>
+                          </a:rPr>
+                          <m:t>𝑖</m:t>
+                        </m:r>
+                      </m:sub>
+                    </m:sSub>
+                  </m:oMath>
+                </a14:m>
+                <a:r>
+                  <a:rPr lang="ko-KR" altLang="en-US" sz="1600" spc="-50" dirty="0"/>
+                  <a:t>는 이 소득계층에 속하는 사람들이 전체 인구에서 차지하는 비율</a:t>
+                </a:r>
+                <a:endParaRPr lang="en-US" altLang="ko-KR" sz="1600" spc="-50" dirty="0"/>
+              </a:p>
+              <a:p>
+                <a:pPr marL="835025" lvl="1" indent="-285750">
+                  <a:lnSpc>
+                    <a:spcPct val="150000"/>
+                  </a:lnSpc>
+                  <a:buFont typeface="Wingdings" panose="05000000000000000000" pitchFamily="2" charset="2"/>
+                  <a:buChar char="ü"/>
+                </a:pPr>
+                <a:r>
+                  <a:rPr lang="ko-KR" altLang="en-US" sz="1600" spc="-50" dirty="0"/>
+                  <a:t>이 식에서 </a:t>
+                </a:r>
+                <a:r>
+                  <a:rPr lang="ko-KR" altLang="en-US" sz="1600" spc="-50" dirty="0" err="1"/>
+                  <a:t>분배매개변수</a:t>
+                </a:r>
+                <a:r>
+                  <a:rPr lang="en-US" altLang="ko-KR" sz="1600" spc="-50" dirty="0"/>
+                  <a:t>(distributive parameter) </a:t>
+                </a:r>
+                <a14:m>
+                  <m:oMath xmlns:m="http://schemas.openxmlformats.org/officeDocument/2006/math">
+                    <m:r>
+                      <a:rPr lang="ko-KR" altLang="en-US" sz="1600" i="1" spc="-50" smtClean="0">
+                        <a:latin typeface="Cambria Math" panose="02040503050406030204" pitchFamily="18" charset="0"/>
+                      </a:rPr>
+                      <m:t>𝜀</m:t>
+                    </m:r>
+                  </m:oMath>
+                </a14:m>
+                <a:r>
+                  <a:rPr lang="ko-KR" altLang="en-US" sz="1600" spc="-50" dirty="0"/>
+                  <a:t>이 중요한 역할을 수행한다</a:t>
+                </a:r>
+                <a:r>
+                  <a:rPr lang="en-US" altLang="ko-KR" sz="1600" spc="-50" dirty="0"/>
+                  <a:t>.</a:t>
+                </a:r>
+              </a:p>
+              <a:p>
+                <a:pPr marL="1292225" lvl="2" indent="-285750">
+                  <a:lnSpc>
+                    <a:spcPct val="150000"/>
+                  </a:lnSpc>
+                  <a:buFont typeface="Wingdings" panose="05000000000000000000" pitchFamily="2" charset="2"/>
+                  <a:buChar char="Ø"/>
+                </a:pPr>
+                <a:r>
+                  <a:rPr lang="ko-KR" altLang="en-US" sz="1600" spc="-50" dirty="0"/>
+                  <a:t>같은 분배상태여도 </a:t>
+                </a:r>
+                <a14:m>
+                  <m:oMath xmlns:m="http://schemas.openxmlformats.org/officeDocument/2006/math">
+                    <m:r>
+                      <a:rPr lang="ko-KR" altLang="en-US" sz="1600" i="1" spc="-50">
+                        <a:latin typeface="Cambria Math" panose="02040503050406030204" pitchFamily="18" charset="0"/>
+                      </a:rPr>
+                      <m:t>𝜀</m:t>
+                    </m:r>
+                  </m:oMath>
+                </a14:m>
+                <a:r>
+                  <a:rPr lang="ko-KR" altLang="en-US" sz="1600" spc="-50" dirty="0"/>
+                  <a:t>값이 달라지면</a:t>
+                </a:r>
+                <a:r>
+                  <a:rPr lang="en-US" altLang="ko-KR" sz="1600" spc="-50" dirty="0"/>
+                  <a:t>, </a:t>
+                </a:r>
+                <a:r>
+                  <a:rPr lang="ko-KR" altLang="en-US" sz="1600" spc="-50" dirty="0" err="1"/>
+                  <a:t>앳킨슨지수가</a:t>
+                </a:r>
+                <a:r>
+                  <a:rPr lang="ko-KR" altLang="en-US" sz="1600" spc="-50" dirty="0"/>
+                  <a:t> 값이 다르기 때문이다</a:t>
+                </a:r>
+                <a:r>
+                  <a:rPr lang="en-US" altLang="ko-KR" sz="1600" spc="-50" dirty="0"/>
+                  <a:t>.</a:t>
+                </a:r>
+              </a:p>
+              <a:p>
+                <a:pPr marL="1292225" lvl="2" indent="-285750">
+                  <a:lnSpc>
+                    <a:spcPct val="150000"/>
+                  </a:lnSpc>
+                  <a:buFont typeface="Wingdings" panose="05000000000000000000" pitchFamily="2" charset="2"/>
+                  <a:buChar char="Ø"/>
+                </a:pPr>
+                <a14:m>
+                  <m:oMath xmlns:m="http://schemas.openxmlformats.org/officeDocument/2006/math">
+                    <m:r>
+                      <a:rPr lang="ko-KR" altLang="en-US" sz="1600" i="1" spc="-50">
+                        <a:latin typeface="Cambria Math" panose="02040503050406030204" pitchFamily="18" charset="0"/>
+                      </a:rPr>
+                      <m:t>𝜀</m:t>
+                    </m:r>
+                  </m:oMath>
+                </a14:m>
+                <a:r>
+                  <a:rPr lang="ko-KR" altLang="en-US" sz="1600" spc="-50" dirty="0"/>
+                  <a:t>는 </a:t>
+                </a:r>
+                <a:r>
+                  <a:rPr lang="en-US" altLang="ko-KR" sz="1600" spc="-50" dirty="0"/>
+                  <a:t>0</a:t>
+                </a:r>
+                <a:r>
+                  <a:rPr lang="ko-KR" altLang="en-US" sz="1600" spc="-50" dirty="0"/>
+                  <a:t>에부터 무한대까지 값을 가질 수 있으며</a:t>
+                </a:r>
+                <a:r>
+                  <a:rPr lang="en-US" altLang="ko-KR" sz="1600" spc="-50" dirty="0"/>
+                  <a:t>, </a:t>
+                </a:r>
+                <a14:m>
+                  <m:oMath xmlns:m="http://schemas.openxmlformats.org/officeDocument/2006/math">
+                    <m:r>
+                      <a:rPr lang="ko-KR" altLang="en-US" sz="1600" i="1" spc="-50">
+                        <a:latin typeface="Cambria Math" panose="02040503050406030204" pitchFamily="18" charset="0"/>
+                      </a:rPr>
+                      <m:t>𝜀</m:t>
+                    </m:r>
+                  </m:oMath>
+                </a14:m>
+                <a:r>
+                  <a:rPr lang="en-US" altLang="ko-KR" sz="1600" spc="-50" dirty="0"/>
+                  <a:t> </a:t>
+                </a:r>
+                <a:r>
+                  <a:rPr lang="ko-KR" altLang="en-US" sz="1600" spc="-50" dirty="0"/>
+                  <a:t>값이 커질수록 저소득층의 소득에 부여하는 가중치 값이 커진다</a:t>
+                </a:r>
+                <a:r>
+                  <a:rPr lang="en-US" altLang="ko-KR" sz="1600" spc="-50" dirty="0"/>
+                  <a:t>.</a:t>
+                </a:r>
+              </a:p>
+              <a:p>
+                <a:pPr marL="1292225" lvl="2" indent="-285750">
+                  <a:lnSpc>
+                    <a:spcPct val="150000"/>
+                  </a:lnSpc>
+                  <a:buFont typeface="Wingdings" panose="05000000000000000000" pitchFamily="2" charset="2"/>
+                  <a:buChar char="Ø"/>
+                </a:pPr>
+                <a:r>
+                  <a:rPr lang="ko-KR" altLang="en-US" sz="1600" spc="-50" dirty="0"/>
+                  <a:t>즉</a:t>
+                </a:r>
+                <a:r>
+                  <a:rPr lang="en-US" altLang="ko-KR" sz="1600" spc="-50" dirty="0"/>
+                  <a:t>, </a:t>
+                </a:r>
+                <a:r>
+                  <a:rPr lang="ko-KR" altLang="en-US" sz="1600" spc="-50" dirty="0"/>
+                  <a:t>평등을 선호하는 사람일수록</a:t>
+                </a:r>
+                <a:r>
+                  <a:rPr lang="en-US" altLang="ko-KR" sz="1600" spc="-50" dirty="0"/>
+                  <a:t>, </a:t>
+                </a:r>
+                <a:r>
+                  <a:rPr lang="ko-KR" altLang="en-US" sz="1600" spc="-50" dirty="0"/>
+                  <a:t>더 높은 </a:t>
+                </a:r>
+                <a14:m>
+                  <m:oMath xmlns:m="http://schemas.openxmlformats.org/officeDocument/2006/math">
+                    <m:r>
+                      <a:rPr lang="ko-KR" altLang="en-US" sz="1600" i="1" spc="-50">
+                        <a:latin typeface="Cambria Math" panose="02040503050406030204" pitchFamily="18" charset="0"/>
+                      </a:rPr>
+                      <m:t>𝜀</m:t>
+                    </m:r>
+                  </m:oMath>
+                </a14:m>
+                <a:r>
+                  <a:rPr lang="en-US" altLang="ko-KR" sz="1600" spc="-50" dirty="0"/>
+                  <a:t> </a:t>
+                </a:r>
+                <a:r>
+                  <a:rPr lang="ko-KR" altLang="en-US" sz="1600" spc="-50" dirty="0"/>
+                  <a:t>값을 마음에 두고 있게 된다</a:t>
+                </a:r>
+                <a:r>
+                  <a:rPr lang="en-US" altLang="ko-KR" sz="1600" spc="-50" dirty="0"/>
+                  <a:t>.</a:t>
+                </a:r>
+              </a:p>
             </p:txBody>
           </p:sp>
         </mc:Choice>
@@ -8017,7 +8350,7 @@
             <p:spPr>
               <a:xfrm>
                 <a:off x="288790" y="958844"/>
-                <a:ext cx="11250267" cy="2301849"/>
+                <a:ext cx="11250267" cy="5626540"/>
               </a:xfrm>
               <a:prstGeom prst="rect">
                 <a:avLst/>
@@ -8025,7 +8358,7 @@
               <a:blipFill>
                 <a:blip r:embed="rId2"/>
                 <a:stretch>
-                  <a:fillRect r="-163" b="-2381"/>
+                  <a:fillRect r="-650" b="-433"/>
                 </a:stretch>
               </a:blipFill>
             </p:spPr>
@@ -8044,8 +8377,8 @@
           </p:sp>
         </mc:Fallback>
       </mc:AlternateContent>
-      <mc:AlternateContent xmlns:mc="http://schemas.openxmlformats.org/markup-compatibility/2006">
-        <mc:Choice xmlns:a14="http://schemas.microsoft.com/office/drawing/2010/main" Requires="a14">
+      <mc:AlternateContent xmlns:mc="http://schemas.openxmlformats.org/markup-compatibility/2006" xmlns:a14="http://schemas.microsoft.com/office/drawing/2010/main">
+        <mc:Choice Requires="a14">
           <p:sp>
             <p:nvSpPr>
               <p:cNvPr id="9" name="TextBox 8">
@@ -8091,13 +8424,7 @@
                         <a:rPr lang="en-US" altLang="ko-KR" b="0" i="1" spc="-50" smtClean="0">
                           <a:latin typeface="Cambria Math" panose="02040503050406030204" pitchFamily="18" charset="0"/>
                         </a:rPr>
-                        <m:t>=</m:t>
-                      </m:r>
-                      <m:r>
-                        <a:rPr lang="en-US" altLang="ko-KR" b="0" i="1" spc="-50" smtClean="0">
-                          <a:latin typeface="Cambria Math" panose="02040503050406030204" pitchFamily="18" charset="0"/>
-                        </a:rPr>
-                        <m:t>1−</m:t>
+                        <m:t>=1−</m:t>
                       </m:r>
                       <m:f>
                         <m:fPr>
@@ -8163,7 +8490,7 @@
             </p:txBody>
           </p:sp>
         </mc:Choice>
-        <mc:Fallback>
+        <mc:Fallback xmlns="">
           <p:sp>
             <p:nvSpPr>
               <p:cNvPr id="9" name="TextBox 8">
@@ -8188,6 +8515,308 @@
               </a:prstGeom>
               <a:blipFill>
                 <a:blip r:embed="rId3"/>
+                <a:stretch>
+                  <a:fillRect/>
+                </a:stretch>
+              </a:blipFill>
+            </p:spPr>
+            <p:txBody>
+              <a:bodyPr/>
+              <a:lstStyle/>
+              <a:p>
+                <a:r>
+                  <a:rPr lang="ko-KR" altLang="en-US">
+                    <a:noFill/>
+                  </a:rPr>
+                  <a:t> </a:t>
+                </a:r>
+              </a:p>
+            </p:txBody>
+          </p:sp>
+        </mc:Fallback>
+      </mc:AlternateContent>
+      <mc:AlternateContent xmlns:mc="http://schemas.openxmlformats.org/markup-compatibility/2006">
+        <mc:Choice xmlns:a14="http://schemas.microsoft.com/office/drawing/2010/main" Requires="a14">
+          <p:sp>
+            <p:nvSpPr>
+              <p:cNvPr id="3" name="TextBox 2">
+                <a:extLst>
+                  <a:ext uri="{FF2B5EF4-FFF2-40B4-BE49-F238E27FC236}">
+                    <a16:creationId xmlns:a16="http://schemas.microsoft.com/office/drawing/2014/main" id="{855798CA-981D-3A56-EBBE-537522F4FF4C}"/>
+                  </a:ext>
+                </a:extLst>
+              </p:cNvPr>
+              <p:cNvSpPr txBox="1"/>
+              <p:nvPr/>
+            </p:nvSpPr>
+            <p:spPr>
+              <a:xfrm>
+                <a:off x="2207353" y="3609666"/>
+                <a:ext cx="3320992" cy="1026178"/>
+              </a:xfrm>
+              <a:prstGeom prst="rect">
+                <a:avLst/>
+              </a:prstGeom>
+              <a:noFill/>
+            </p:spPr>
+            <p:txBody>
+              <a:bodyPr wrap="square">
+                <a:spAutoFit/>
+              </a:bodyPr>
+              <a:lstStyle/>
+              <a:p>
+                <a:pPr/>
+                <a14:m>
+                  <m:oMathPara xmlns:m="http://schemas.openxmlformats.org/officeDocument/2006/math">
+                    <m:oMathParaPr>
+                      <m:jc m:val="centerGroup"/>
+                    </m:oMathParaPr>
+                    <m:oMath xmlns:m="http://schemas.openxmlformats.org/officeDocument/2006/math">
+                      <m:r>
+                        <a:rPr lang="en-US" altLang="ko-KR" b="0" i="1" spc="-50" smtClean="0">
+                          <a:latin typeface="Cambria Math" panose="02040503050406030204" pitchFamily="18" charset="0"/>
+                        </a:rPr>
+                        <m:t>𝐴</m:t>
+                      </m:r>
+                      <m:r>
+                        <a:rPr lang="en-US" altLang="ko-KR" b="0" i="1" spc="-50" smtClean="0">
+                          <a:latin typeface="Cambria Math" panose="02040503050406030204" pitchFamily="18" charset="0"/>
+                        </a:rPr>
+                        <m:t>=1−</m:t>
+                      </m:r>
+                      <m:sSup>
+                        <m:sSupPr>
+                          <m:ctrlPr>
+                            <a:rPr lang="en-US" altLang="ko-KR" b="0" i="1" spc="-50" smtClean="0">
+                              <a:latin typeface="Cambria Math" panose="02040503050406030204" pitchFamily="18" charset="0"/>
+                            </a:rPr>
+                          </m:ctrlPr>
+                        </m:sSupPr>
+                        <m:e>
+                          <m:d>
+                            <m:dPr>
+                              <m:begChr m:val="["/>
+                              <m:endChr m:val="]"/>
+                              <m:ctrlPr>
+                                <a:rPr lang="en-US" altLang="ko-KR" i="1" spc="-50">
+                                  <a:latin typeface="Cambria Math" panose="02040503050406030204" pitchFamily="18" charset="0"/>
+                                </a:rPr>
+                              </m:ctrlPr>
+                            </m:dPr>
+                            <m:e>
+                              <m:nary>
+                                <m:naryPr>
+                                  <m:chr m:val="∑"/>
+                                  <m:ctrlPr>
+                                    <a:rPr lang="en-US" altLang="ko-KR" i="1" spc="-50">
+                                      <a:latin typeface="Cambria Math" panose="02040503050406030204" pitchFamily="18" charset="0"/>
+                                    </a:rPr>
+                                  </m:ctrlPr>
+                                </m:naryPr>
+                                <m:sub>
+                                  <m:r>
+                                    <m:rPr>
+                                      <m:brk m:alnAt="23"/>
+                                    </m:rPr>
+                                    <a:rPr lang="en-US" altLang="ko-KR" i="1" spc="-50">
+                                      <a:latin typeface="Cambria Math" panose="02040503050406030204" pitchFamily="18" charset="0"/>
+                                    </a:rPr>
+                                    <m:t>𝑖</m:t>
+                                  </m:r>
+                                  <m:r>
+                                    <a:rPr lang="en-US" altLang="ko-KR" i="1" spc="-50">
+                                      <a:latin typeface="Cambria Math" panose="02040503050406030204" pitchFamily="18" charset="0"/>
+                                    </a:rPr>
+                                    <m:t>=1</m:t>
+                                  </m:r>
+                                </m:sub>
+                                <m:sup>
+                                  <m:r>
+                                    <a:rPr lang="en-US" altLang="ko-KR" i="1" spc="-50">
+                                      <a:latin typeface="Cambria Math" panose="02040503050406030204" pitchFamily="18" charset="0"/>
+                                    </a:rPr>
+                                    <m:t>𝑛</m:t>
+                                  </m:r>
+                                </m:sup>
+                                <m:e>
+                                  <m:sSup>
+                                    <m:sSupPr>
+                                      <m:ctrlPr>
+                                        <a:rPr lang="en-US" altLang="ko-KR" i="1" spc="-50">
+                                          <a:latin typeface="Cambria Math" panose="02040503050406030204" pitchFamily="18" charset="0"/>
+                                        </a:rPr>
+                                      </m:ctrlPr>
+                                    </m:sSupPr>
+                                    <m:e>
+                                      <m:f>
+                                        <m:fPr>
+                                          <m:ctrlPr>
+                                            <a:rPr lang="en-US" altLang="ko-KR" i="1" spc="-50">
+                                              <a:latin typeface="Cambria Math" panose="02040503050406030204" pitchFamily="18" charset="0"/>
+                                            </a:rPr>
+                                          </m:ctrlPr>
+                                        </m:fPr>
+                                        <m:num>
+                                          <m:sSub>
+                                            <m:sSubPr>
+                                              <m:ctrlPr>
+                                                <a:rPr lang="en-US" altLang="ko-KR" i="1" spc="-50">
+                                                  <a:latin typeface="Cambria Math" panose="02040503050406030204" pitchFamily="18" charset="0"/>
+                                                </a:rPr>
+                                              </m:ctrlPr>
+                                            </m:sSubPr>
+                                            <m:e>
+                                              <m:r>
+                                                <a:rPr lang="en-US" altLang="ko-KR" i="1" spc="-50">
+                                                  <a:latin typeface="Cambria Math" panose="02040503050406030204" pitchFamily="18" charset="0"/>
+                                                </a:rPr>
+                                                <m:t>𝑌</m:t>
+                                              </m:r>
+                                            </m:e>
+                                            <m:sub>
+                                              <m:r>
+                                                <a:rPr lang="en-US" altLang="ko-KR" i="1" spc="-50">
+                                                  <a:latin typeface="Cambria Math" panose="02040503050406030204" pitchFamily="18" charset="0"/>
+                                                </a:rPr>
+                                                <m:t>𝑖</m:t>
+                                              </m:r>
+                                            </m:sub>
+                                          </m:sSub>
+                                        </m:num>
+                                        <m:den>
+                                          <m:bar>
+                                            <m:barPr>
+                                              <m:pos m:val="top"/>
+                                              <m:ctrlPr>
+                                                <a:rPr lang="en-US" altLang="ko-KR" i="1" spc="-50">
+                                                  <a:latin typeface="Cambria Math" panose="02040503050406030204" pitchFamily="18" charset="0"/>
+                                                </a:rPr>
+                                              </m:ctrlPr>
+                                            </m:barPr>
+                                            <m:e>
+                                              <m:r>
+                                                <a:rPr lang="en-US" altLang="ko-KR" i="1" spc="-50">
+                                                  <a:latin typeface="Cambria Math" panose="02040503050406030204" pitchFamily="18" charset="0"/>
+                                                </a:rPr>
+                                                <m:t>𝑌</m:t>
+                                              </m:r>
+                                            </m:e>
+                                          </m:bar>
+                                        </m:den>
+                                      </m:f>
+                                    </m:e>
+                                    <m:sup>
+                                      <m:r>
+                                        <a:rPr lang="en-US" altLang="ko-KR" i="1" spc="-50">
+                                          <a:latin typeface="Cambria Math" panose="02040503050406030204" pitchFamily="18" charset="0"/>
+                                        </a:rPr>
+                                        <m:t>1−</m:t>
+                                      </m:r>
+                                      <m:r>
+                                        <a:rPr lang="ko-KR" altLang="en-US" i="1" spc="-50">
+                                          <a:latin typeface="Cambria Math" panose="02040503050406030204" pitchFamily="18" charset="0"/>
+                                        </a:rPr>
+                                        <m:t>𝜀</m:t>
+                                      </m:r>
+                                    </m:sup>
+                                  </m:sSup>
+                                </m:e>
+                              </m:nary>
+                              <m:sSub>
+                                <m:sSubPr>
+                                  <m:ctrlPr>
+                                    <a:rPr lang="en-US" altLang="ko-KR" i="1" spc="-50">
+                                      <a:latin typeface="Cambria Math" panose="02040503050406030204" pitchFamily="18" charset="0"/>
+                                    </a:rPr>
+                                  </m:ctrlPr>
+                                </m:sSubPr>
+                                <m:e>
+                                  <m:r>
+                                    <a:rPr lang="en-US" altLang="ko-KR" i="1" spc="-50">
+                                      <a:latin typeface="Cambria Math" panose="02040503050406030204" pitchFamily="18" charset="0"/>
+                                    </a:rPr>
+                                    <m:t>𝑓</m:t>
+                                  </m:r>
+                                </m:e>
+                                <m:sub>
+                                  <m:r>
+                                    <a:rPr lang="en-US" altLang="ko-KR" i="1" spc="-50">
+                                      <a:latin typeface="Cambria Math" panose="02040503050406030204" pitchFamily="18" charset="0"/>
+                                    </a:rPr>
+                                    <m:t>𝑖</m:t>
+                                  </m:r>
+                                </m:sub>
+                              </m:sSub>
+                            </m:e>
+                          </m:d>
+                        </m:e>
+                        <m:sup>
+                          <m:f>
+                            <m:fPr>
+                              <m:ctrlPr>
+                                <a:rPr lang="en-US" altLang="ko-KR" b="0" i="1" spc="-50" smtClean="0">
+                                  <a:latin typeface="Cambria Math" panose="02040503050406030204" pitchFamily="18" charset="0"/>
+                                </a:rPr>
+                              </m:ctrlPr>
+                            </m:fPr>
+                            <m:num>
+                              <m:r>
+                                <a:rPr lang="en-US" altLang="ko-KR" b="0" i="1" spc="-50" smtClean="0">
+                                  <a:latin typeface="Cambria Math" panose="02040503050406030204" pitchFamily="18" charset="0"/>
+                                </a:rPr>
+                                <m:t>1</m:t>
+                              </m:r>
+                            </m:num>
+                            <m:den>
+                              <m:r>
+                                <a:rPr lang="en-US" altLang="ko-KR" b="0" i="1" spc="-50" smtClean="0">
+                                  <a:latin typeface="Cambria Math" panose="02040503050406030204" pitchFamily="18" charset="0"/>
+                                </a:rPr>
+                                <m:t>1−</m:t>
+                              </m:r>
+                              <m:r>
+                                <a:rPr lang="ko-KR" altLang="en-US" b="0" i="1" spc="-50" smtClean="0">
+                                  <a:latin typeface="Cambria Math" panose="02040503050406030204" pitchFamily="18" charset="0"/>
+                                </a:rPr>
+                                <m:t>𝜀</m:t>
+                              </m:r>
+                            </m:den>
+                          </m:f>
+                        </m:sup>
+                      </m:sSup>
+                    </m:oMath>
+                  </m:oMathPara>
+                </a14:m>
+                <a:endParaRPr lang="ko-KR" altLang="en-US" dirty="0"/>
+              </a:p>
+            </p:txBody>
+          </p:sp>
+        </mc:Choice>
+        <mc:Fallback>
+          <p:sp>
+            <p:nvSpPr>
+              <p:cNvPr id="3" name="TextBox 2">
+                <a:extLst>
+                  <a:ext uri="{FF2B5EF4-FFF2-40B4-BE49-F238E27FC236}">
+                    <a16:creationId xmlns:a16="http://schemas.microsoft.com/office/drawing/2014/main" id="{855798CA-981D-3A56-EBBE-537522F4FF4C}"/>
+                  </a:ext>
+                </a:extLst>
+              </p:cNvPr>
+              <p:cNvSpPr txBox="1">
+                <a:spLocks noRot="1" noChangeAspect="1" noMove="1" noResize="1" noEditPoints="1" noAdjustHandles="1" noChangeArrowheads="1" noChangeShapeType="1" noTextEdit="1"/>
+              </p:cNvSpPr>
+              <p:nvPr/>
+            </p:nvSpPr>
+            <p:spPr>
+              <a:xfrm>
+                <a:off x="2207353" y="3609666"/>
+                <a:ext cx="3320992" cy="1026178"/>
+              </a:xfrm>
+              <a:prstGeom prst="rect">
+                <a:avLst/>
+              </a:prstGeom>
+              <a:blipFill>
+                <a:blip r:embed="rId4"/>
                 <a:stretch>
                   <a:fillRect/>
                 </a:stretch>
